--- a/ContinuationProject/ContentTeam/ProcessSafetyFunction.pptx
+++ b/ContinuationProject/ContentTeam/ProcessSafetyFunction.pptx
@@ -5,21 +5,17 @@
     <p:sldMasterId id="2147483660" r:id="rId1"/>
   </p:sldMasterIdLst>
   <p:notesMasterIdLst>
-    <p:notesMasterId r:id="rId9"/>
+    <p:notesMasterId r:id="rId5"/>
   </p:notesMasterIdLst>
   <p:sldIdLst>
     <p:sldId id="278" r:id="rId2"/>
     <p:sldId id="383" r:id="rId3"/>
     <p:sldId id="384" r:id="rId4"/>
-    <p:sldId id="385" r:id="rId5"/>
-    <p:sldId id="386" r:id="rId6"/>
-    <p:sldId id="387" r:id="rId7"/>
-    <p:sldId id="381" r:id="rId8"/>
   </p:sldIdLst>
   <p:sldSz cx="9144000" cy="5143500" type="screen16x9"/>
   <p:notesSz cx="6858000" cy="9144000"/>
   <p:custDataLst>
-    <p:tags r:id="rId10"/>
+    <p:tags r:id="rId6"/>
   </p:custDataLst>
   <p:defaultTextStyle>
     <a:defPPr>
@@ -229,7 +225,7 @@
             <a:fld id="{4AA9FAFC-2319-504C-A7E6-C27BB7BBEBBC}" type="datetimeFigureOut">
               <a:rPr lang="mr-IN"/>
               <a:pPr/>
-              <a:t>19-08-2025</a:t>
+              <a:t>29-09-2025</a:t>
             </a:fld>
             <a:endParaRPr lang="mr-IN"/>
           </a:p>
@@ -501,264 +497,6 @@
 </p:notesMaster>
 </file>
 
-<file path=ppt/notesSlides/notesSlide1.xml><?xml version="1.0" encoding="utf-8"?>
-<p:notes xmlns:a="http://schemas.openxmlformats.org/drawingml/2006/main" xmlns:r="http://schemas.openxmlformats.org/officeDocument/2006/relationships" xmlns:p="http://schemas.openxmlformats.org/presentationml/2006/main">
-  <p:cSld>
-    <p:spTree>
-      <p:nvGrpSpPr>
-        <p:cNvPr id="1" name=""/>
-        <p:cNvGrpSpPr/>
-        <p:nvPr/>
-      </p:nvGrpSpPr>
-      <p:grpSpPr>
-        <a:xfrm>
-          <a:off x="0" y="0"/>
-          <a:ext cx="0" cy="0"/>
-          <a:chOff x="0" y="0"/>
-          <a:chExt cx="0" cy="0"/>
-        </a:xfrm>
-      </p:grpSpPr>
-      <p:sp>
-        <p:nvSpPr>
-          <p:cNvPr id="2" name="Folienbildplatzhalter 1"/>
-          <p:cNvSpPr>
-            <a:spLocks noGrp="1" noRot="1" noChangeAspect="1"/>
-          </p:cNvSpPr>
-          <p:nvPr>
-            <p:ph type="sldImg"/>
-          </p:nvPr>
-        </p:nvSpPr>
-        <p:spPr/>
-      </p:sp>
-      <p:sp>
-        <p:nvSpPr>
-          <p:cNvPr id="3" name="Notizenplatzhalter 2"/>
-          <p:cNvSpPr>
-            <a:spLocks noGrp="1"/>
-          </p:cNvSpPr>
-          <p:nvPr>
-            <p:ph type="body" idx="1"/>
-          </p:nvPr>
-        </p:nvSpPr>
-        <p:spPr/>
-        <p:txBody>
-          <a:bodyPr/>
-          <a:lstStyle/>
-          <a:p>
-            <a:r>
-              <a:rPr lang="en-US" dirty="0"/>
-              <a:t>&lt;ProcessSignalGeneratingSystem ID = "ProcessSignalGeneratingSystem-1" </a:t>
-            </a:r>
-            <a:r>
-              <a:rPr lang="en-US" dirty="0" err="1"/>
-              <a:t>ComponentClass</a:t>
-            </a:r>
-            <a:r>
-              <a:rPr lang="en-US" dirty="0"/>
-              <a:t> = "ProcessSignalGeneratingSystem"&gt;</a:t>
-            </a:r>
-          </a:p>
-          <a:p>
-            <a:r>
-              <a:rPr lang="en-US" dirty="0"/>
-              <a:t>  &lt;ProcessSignalGeneratingSystemComponent ID = "SensorWellReference-1" </a:t>
-            </a:r>
-            <a:r>
-              <a:rPr lang="en-US" dirty="0" err="1"/>
-              <a:t>ComponentClass</a:t>
-            </a:r>
-            <a:r>
-              <a:rPr lang="en-US" dirty="0"/>
-              <a:t> = "SensorWellReference"&gt;</a:t>
-            </a:r>
-          </a:p>
-          <a:p>
-            <a:r>
-              <a:rPr lang="en-US" dirty="0"/>
-              <a:t>    &lt;Association Type = "refers to" </a:t>
-            </a:r>
-            <a:r>
-              <a:rPr lang="en-US" dirty="0" err="1"/>
-              <a:t>ItemID</a:t>
-            </a:r>
-            <a:r>
-              <a:rPr lang="en-US" dirty="0"/>
-              <a:t> = "SensorWell-1"/&gt;</a:t>
-            </a:r>
-          </a:p>
-          <a:p>
-            <a:r>
-              <a:rPr lang="en-US" dirty="0"/>
-              <a:t>  &lt;/ProcessSignalGeneratingSystemComponent&gt;</a:t>
-            </a:r>
-          </a:p>
-          <a:p>
-            <a:r>
-              <a:rPr lang="en-US" dirty="0"/>
-              <a:t>&lt;/ProcessSignalGeneratingSystem&gt;</a:t>
-            </a:r>
-          </a:p>
-          <a:p>
-            <a:r>
-              <a:rPr lang="en-US" dirty="0"/>
-              <a:t>&lt;</a:t>
-            </a:r>
-            <a:r>
-              <a:rPr lang="en-US" dirty="0" err="1"/>
-              <a:t>PipingNetworkSystem</a:t>
-            </a:r>
-            <a:r>
-              <a:rPr lang="en-US" dirty="0"/>
-              <a:t> ID = "PipingNetworkSystem-1" </a:t>
-            </a:r>
-            <a:r>
-              <a:rPr lang="en-US" dirty="0" err="1"/>
-              <a:t>ComponentClass</a:t>
-            </a:r>
-            <a:r>
-              <a:rPr lang="en-US" dirty="0"/>
-              <a:t> = "</a:t>
-            </a:r>
-            <a:r>
-              <a:rPr lang="en-US" dirty="0" err="1"/>
-              <a:t>PipingNetworkSystem</a:t>
-            </a:r>
-            <a:r>
-              <a:rPr lang="en-US" dirty="0"/>
-              <a:t>"&gt;</a:t>
-            </a:r>
-          </a:p>
-          <a:p>
-            <a:r>
-              <a:rPr lang="en-US" dirty="0"/>
-              <a:t>  &lt;</a:t>
-            </a:r>
-            <a:r>
-              <a:rPr lang="en-US" dirty="0" err="1"/>
-              <a:t>PipingNetworkSegment</a:t>
-            </a:r>
-            <a:r>
-              <a:rPr lang="en-US" dirty="0"/>
-              <a:t> ID = "PipingNetworkSegment-1" </a:t>
-            </a:r>
-            <a:r>
-              <a:rPr lang="en-US" dirty="0" err="1"/>
-              <a:t>ComponentClass</a:t>
-            </a:r>
-            <a:r>
-              <a:rPr lang="en-US" dirty="0"/>
-              <a:t> = "</a:t>
-            </a:r>
-            <a:r>
-              <a:rPr lang="en-US" dirty="0" err="1"/>
-              <a:t>PipingNetworkSegment</a:t>
-            </a:r>
-            <a:r>
-              <a:rPr lang="en-US" dirty="0"/>
-              <a:t>"&gt;</a:t>
-            </a:r>
-          </a:p>
-          <a:p>
-            <a:r>
-              <a:rPr lang="en-US" dirty="0"/>
-              <a:t>    &lt;PipingComponent ID = "SensorWell-1" </a:t>
-            </a:r>
-            <a:r>
-              <a:rPr lang="en-US" dirty="0" err="1"/>
-              <a:t>ComponentClass</a:t>
-            </a:r>
-            <a:r>
-              <a:rPr lang="en-US" dirty="0"/>
-              <a:t> = "SensorWell"&gt;</a:t>
-            </a:r>
-          </a:p>
-          <a:p>
-            <a:r>
-              <a:rPr lang="en-US" dirty="0"/>
-              <a:t>      &lt;Association Type = "is referenced by" </a:t>
-            </a:r>
-            <a:r>
-              <a:rPr lang="en-US" dirty="0" err="1"/>
-              <a:t>ItemID</a:t>
-            </a:r>
-            <a:r>
-              <a:rPr lang="en-US" dirty="0"/>
-              <a:t> = "SensorWellReference-1"/&gt;</a:t>
-            </a:r>
-          </a:p>
-          <a:p>
-            <a:r>
-              <a:rPr lang="en-US" dirty="0"/>
-              <a:t>    &lt;/PipingComponent&gt;</a:t>
-            </a:r>
-          </a:p>
-          <a:p>
-            <a:r>
-              <a:rPr lang="en-US" dirty="0"/>
-              <a:t>  &lt;/</a:t>
-            </a:r>
-            <a:r>
-              <a:rPr lang="en-US" dirty="0" err="1"/>
-              <a:t>PipingNetworkSegment</a:t>
-            </a:r>
-            <a:r>
-              <a:rPr lang="en-US" dirty="0"/>
-              <a:t>&gt;</a:t>
-            </a:r>
-          </a:p>
-          <a:p>
-            <a:r>
-              <a:rPr lang="en-US" dirty="0"/>
-              <a:t>&lt;/</a:t>
-            </a:r>
-            <a:r>
-              <a:rPr lang="en-US" dirty="0" err="1"/>
-              <a:t>PipingNetworkSystem</a:t>
-            </a:r>
-            <a:r>
-              <a:rPr lang="en-US" dirty="0"/>
-              <a:t>&gt;</a:t>
-            </a:r>
-          </a:p>
-        </p:txBody>
-      </p:sp>
-      <p:sp>
-        <p:nvSpPr>
-          <p:cNvPr id="4" name="Foliennummernplatzhalter 3"/>
-          <p:cNvSpPr>
-            <a:spLocks noGrp="1"/>
-          </p:cNvSpPr>
-          <p:nvPr>
-            <p:ph type="sldNum" sz="quarter" idx="5"/>
-          </p:nvPr>
-        </p:nvSpPr>
-        <p:spPr/>
-        <p:txBody>
-          <a:bodyPr/>
-          <a:lstStyle/>
-          <a:p>
-            <a:fld id="{8E2C8280-5F62-3D48-BBB9-576BF0EE92F4}" type="slidenum">
-              <a:rPr lang="uk-UA" smtClean="0"/>
-              <a:pPr/>
-              <a:t>6</a:t>
-            </a:fld>
-            <a:endParaRPr lang="uk-UA"/>
-          </a:p>
-        </p:txBody>
-      </p:sp>
-    </p:spTree>
-    <p:extLst>
-      <p:ext uri="{BB962C8B-B14F-4D97-AF65-F5344CB8AC3E}">
-        <p14:creationId xmlns:p14="http://schemas.microsoft.com/office/powerpoint/2010/main" val="2110067729"/>
-      </p:ext>
-    </p:extLst>
-  </p:cSld>
-  <p:clrMapOvr>
-    <a:masterClrMapping/>
-  </p:clrMapOvr>
-</p:notes>
-</file>
-
 <file path=ppt/slideLayouts/slideLayout1.xml><?xml version="1.0" encoding="utf-8"?>
 <p:sldLayout xmlns:a="http://schemas.openxmlformats.org/drawingml/2006/main" xmlns:r="http://schemas.openxmlformats.org/officeDocument/2006/relationships" xmlns:p="http://schemas.openxmlformats.org/presentationml/2006/main" preserve="1" userDrawn="1">
   <p:cSld name="Cover A">
@@ -1527,7 +1265,7 @@
             <a:fld id="{C8927868-526A-4C6B-96A5-2F672AB9D3F4}" type="datetimeFigureOut">
               <a:rPr lang="en-US" smtClean="0"/>
               <a:pPr/>
-              <a:t>8/19/2025</a:t>
+              <a:t>9/29/2025</a:t>
             </a:fld>
             <a:endParaRPr lang="en-US"/>
           </a:p>
@@ -4225,7 +3963,7 @@
           <a:p>
             <a:r>
               <a:rPr lang="en-US" dirty="0"/>
-              <a:t>2025-08-18 V1 Tonia Pedersen</a:t>
+              <a:t>2025-09-29 V1 Tonia Pedersen</a:t>
             </a:r>
           </a:p>
         </p:txBody>
@@ -4274,67 +4012,6 @@
       </p:grpSpPr>
       <p:sp>
         <p:nvSpPr>
-          <p:cNvPr id="8" name="Rechteck 7">
-            <a:extLst>
-              <a:ext uri="{FF2B5EF4-FFF2-40B4-BE49-F238E27FC236}">
-                <a16:creationId xmlns:a16="http://schemas.microsoft.com/office/drawing/2014/main" id="{0C6AA2B1-B22B-5297-85C0-1655250DC120}"/>
-              </a:ext>
-            </a:extLst>
-          </p:cNvPr>
-          <p:cNvSpPr/>
-          <p:nvPr/>
-        </p:nvSpPr>
-        <p:spPr>
-          <a:xfrm>
-            <a:off x="5833854" y="1649547"/>
-            <a:ext cx="3200896" cy="3279735"/>
-          </a:xfrm>
-          <a:prstGeom prst="rect">
-            <a:avLst/>
-          </a:prstGeom>
-          <a:noFill/>
-          <a:ln w="25400">
-            <a:solidFill>
-              <a:schemeClr val="tx1"/>
-            </a:solidFill>
-          </a:ln>
-        </p:spPr>
-        <p:style>
-          <a:lnRef idx="2">
-            <a:schemeClr val="accent1">
-              <a:shade val="50000"/>
-            </a:schemeClr>
-          </a:lnRef>
-          <a:fillRef idx="1">
-            <a:schemeClr val="accent1"/>
-          </a:fillRef>
-          <a:effectRef idx="0">
-            <a:schemeClr val="accent1"/>
-          </a:effectRef>
-          <a:fontRef idx="minor">
-            <a:schemeClr val="lt1"/>
-          </a:fontRef>
-        </p:style>
-        <p:txBody>
-          <a:bodyPr rot="0" spcFirstLastPara="0" vertOverflow="overflow" horzOverflow="overflow" vert="horz" wrap="square" lIns="91440" tIns="45720" rIns="91440" bIns="45720" numCol="1" spcCol="0" rtlCol="0" fromWordArt="0" anchor="ctr" anchorCtr="0" forceAA="0" compatLnSpc="1">
-            <a:prstTxWarp prst="textNoShape">
-              <a:avLst/>
-            </a:prstTxWarp>
-            <a:noAutofit/>
-          </a:bodyPr>
-          <a:lstStyle/>
-          <a:p>
-            <a:pPr algn="ctr">
-              <a:lnSpc>
-                <a:spcPct val="90000"/>
-              </a:lnSpc>
-            </a:pPr>
-            <a:endParaRPr lang="en-US" sz="1600"/>
-          </a:p>
-        </p:txBody>
-      </p:sp>
-      <p:sp>
-        <p:nvSpPr>
           <p:cNvPr id="2" name="Titel 1">
             <a:extLst>
               <a:ext uri="{FF2B5EF4-FFF2-40B4-BE49-F238E27FC236}">
@@ -4379,8 +4056,8 @@
         </p:nvSpPr>
         <p:spPr>
           <a:xfrm>
-            <a:off x="304799" y="1123950"/>
-            <a:ext cx="8736725" cy="551172"/>
+            <a:off x="298025" y="742950"/>
+            <a:ext cx="8736725" cy="798782"/>
           </a:xfrm>
         </p:spPr>
         <p:txBody>
@@ -4435,8 +4112,8 @@
         </p:nvSpPr>
         <p:spPr>
           <a:xfrm>
-            <a:off x="304798" y="4547502"/>
-            <a:ext cx="8736725" cy="457201"/>
+            <a:off x="224374" y="4204985"/>
+            <a:ext cx="5500766" cy="724297"/>
           </a:xfrm>
           <a:prstGeom prst="rect">
             <a:avLst/>
@@ -4631,23 +4308,20 @@
             </a:lvl9pPr>
           </a:lstStyle>
           <a:p>
-            <a:r>
-              <a:rPr lang="en-US" dirty="0">
-                <a:solidFill>
-                  <a:srgbClr val="FF0000"/>
-                </a:solidFill>
-              </a:rPr>
-              <a:t>Unambiguous identification of import Process Safety Functions</a:t>
-            </a:r>
+            <a:endParaRPr lang="en-US" dirty="0">
+              <a:solidFill>
+                <a:srgbClr val="FF0000"/>
+              </a:solidFill>
+            </a:endParaRPr>
           </a:p>
         </p:txBody>
       </p:sp>
       <p:sp>
         <p:nvSpPr>
-          <p:cNvPr id="7" name="Inhaltsplatzhalter 2">
+          <p:cNvPr id="9" name="Inhaltsplatzhalter 2">
             <a:extLst>
               <a:ext uri="{FF2B5EF4-FFF2-40B4-BE49-F238E27FC236}">
-                <a16:creationId xmlns:a16="http://schemas.microsoft.com/office/drawing/2014/main" id="{61A3B9D7-D905-62DE-BEF1-0519FC4841D1}"/>
+                <a16:creationId xmlns:a16="http://schemas.microsoft.com/office/drawing/2014/main" id="{8DEEF7BC-075E-4AAA-EBCC-04776F9BE24B}"/>
               </a:ext>
             </a:extLst>
           </p:cNvPr>
@@ -4658,8 +4332,8 @@
         </p:nvSpPr>
         <p:spPr>
           <a:xfrm>
-            <a:off x="5972614" y="1785742"/>
-            <a:ext cx="2941272" cy="786008"/>
+            <a:off x="298024" y="1597299"/>
+            <a:ext cx="8736725" cy="1056014"/>
           </a:xfrm>
           <a:prstGeom prst="rect">
             <a:avLst/>
@@ -4855,21 +4529,44 @@
           </a:lstStyle>
           <a:p>
             <a:pPr marL="0" indent="0">
+              <a:buFont typeface="Wingdings" charset="2"/>
               <a:buNone/>
             </a:pPr>
             <a:r>
               <a:rPr lang="en-US" dirty="0"/>
-              <a:t>Example:</a:t>
+              <a:t>Gap: </a:t>
+            </a:r>
+          </a:p>
+          <a:p>
+            <a:pPr lvl="1"/>
+            <a:r>
+              <a:rPr lang="en-US" dirty="0">
+                <a:solidFill>
+                  <a:srgbClr val="FF0000"/>
+                </a:solidFill>
+              </a:rPr>
+              <a:t>Unambiguous identification of import Process Safety Functions</a:t>
+            </a:r>
+          </a:p>
+          <a:p>
+            <a:pPr lvl="1"/>
+            <a:r>
+              <a:rPr lang="en-US" dirty="0">
+                <a:solidFill>
+                  <a:srgbClr val="FF0000"/>
+                </a:solidFill>
+              </a:rPr>
+              <a:t>The safety system is an independent barrier against accidents and shall be separate from other systems.</a:t>
             </a:r>
           </a:p>
         </p:txBody>
       </p:sp>
       <p:pic>
         <p:nvPicPr>
-          <p:cNvPr id="6" name="Picture 5">
+          <p:cNvPr id="11" name="Picture 10">
             <a:extLst>
               <a:ext uri="{FF2B5EF4-FFF2-40B4-BE49-F238E27FC236}">
-                <a16:creationId xmlns:a16="http://schemas.microsoft.com/office/drawing/2014/main" id="{084BAFD6-0A02-CB34-FB0F-6145B6C2FFAB}"/>
+                <a16:creationId xmlns:a16="http://schemas.microsoft.com/office/drawing/2014/main" id="{BF8827E0-8121-EFF0-41F9-20F1A8C7223B}"/>
               </a:ext>
             </a:extLst>
           </p:cNvPr>
@@ -4886,38 +4583,8 @@
         </p:blipFill>
         <p:spPr>
           <a:xfrm>
-            <a:off x="1323745" y="2233748"/>
-            <a:ext cx="2128278" cy="1845328"/>
-          </a:xfrm>
-          <a:prstGeom prst="rect">
-            <a:avLst/>
-          </a:prstGeom>
-        </p:spPr>
-      </p:pic>
-      <p:pic>
-        <p:nvPicPr>
-          <p:cNvPr id="14" name="Picture 13">
-            <a:extLst>
-              <a:ext uri="{FF2B5EF4-FFF2-40B4-BE49-F238E27FC236}">
-                <a16:creationId xmlns:a16="http://schemas.microsoft.com/office/drawing/2014/main" id="{96642903-4D19-2C0A-2196-668D9CE982F1}"/>
-              </a:ext>
-            </a:extLst>
-          </p:cNvPr>
-          <p:cNvPicPr>
-            <a:picLocks noChangeAspect="1"/>
-          </p:cNvPicPr>
-          <p:nvPr/>
-        </p:nvPicPr>
-        <p:blipFill>
-          <a:blip r:embed="rId3"/>
-          <a:stretch>
-            <a:fillRect/>
-          </a:stretch>
-        </p:blipFill>
-        <p:spPr>
-          <a:xfrm>
-            <a:off x="6051282" y="2580522"/>
-            <a:ext cx="1557831" cy="2277228"/>
+            <a:off x="603352" y="2914184"/>
+            <a:ext cx="2371405" cy="1937922"/>
           </a:xfrm>
           <a:prstGeom prst="rect">
             <a:avLst/>
@@ -5074,758 +4741,6 @@
     <p:extLst>
       <p:ext uri="{BB962C8B-B14F-4D97-AF65-F5344CB8AC3E}">
         <p14:creationId xmlns:p14="http://schemas.microsoft.com/office/powerpoint/2010/main" val="536095974"/>
-      </p:ext>
-    </p:extLst>
-  </p:cSld>
-  <p:clrMapOvr>
-    <a:masterClrMapping/>
-  </p:clrMapOvr>
-  <mc:AlternateContent xmlns:mc="http://schemas.openxmlformats.org/markup-compatibility/2006" xmlns:p14="http://schemas.microsoft.com/office/powerpoint/2010/main">
-    <mc:Choice Requires="p14">
-      <p:transition p14:dur="250">
-        <p:fade/>
-      </p:transition>
-    </mc:Choice>
-    <mc:Fallback xmlns="">
-      <p:transition>
-        <p:fade/>
-      </p:transition>
-    </mc:Fallback>
-  </mc:AlternateContent>
-</p:sld>
-</file>
-
-<file path=ppt/slides/slide4.xml><?xml version="1.0" encoding="utf-8"?>
-<p:sld xmlns:a="http://schemas.openxmlformats.org/drawingml/2006/main" xmlns:r="http://schemas.openxmlformats.org/officeDocument/2006/relationships" xmlns:p="http://schemas.openxmlformats.org/presentationml/2006/main" show="0">
-  <p:cSld>
-    <p:spTree>
-      <p:nvGrpSpPr>
-        <p:cNvPr id="1" name=""/>
-        <p:cNvGrpSpPr/>
-        <p:nvPr/>
-      </p:nvGrpSpPr>
-      <p:grpSpPr>
-        <a:xfrm>
-          <a:off x="0" y="0"/>
-          <a:ext cx="0" cy="0"/>
-          <a:chOff x="0" y="0"/>
-          <a:chExt cx="0" cy="0"/>
-        </a:xfrm>
-      </p:grpSpPr>
-      <p:sp>
-        <p:nvSpPr>
-          <p:cNvPr id="2" name="Titel 1">
-            <a:extLst>
-              <a:ext uri="{FF2B5EF4-FFF2-40B4-BE49-F238E27FC236}">
-                <a16:creationId xmlns:a16="http://schemas.microsoft.com/office/drawing/2014/main" id="{89C0513C-6788-B285-18CF-2889B3C609AC}"/>
-              </a:ext>
-            </a:extLst>
-          </p:cNvPr>
-          <p:cNvSpPr>
-            <a:spLocks noGrp="1"/>
-          </p:cNvSpPr>
-          <p:nvPr>
-            <p:ph type="title"/>
-          </p:nvPr>
-        </p:nvSpPr>
-        <p:spPr/>
-        <p:txBody>
-          <a:bodyPr/>
-          <a:lstStyle/>
-          <a:p>
-            <a:r>
-              <a:rPr lang="en-US" dirty="0"/>
-              <a:t>Example</a:t>
-            </a:r>
-          </a:p>
-        </p:txBody>
-      </p:sp>
-      <p:sp>
-        <p:nvSpPr>
-          <p:cNvPr id="4" name="Textplatzhalter 3">
-            <a:extLst>
-              <a:ext uri="{FF2B5EF4-FFF2-40B4-BE49-F238E27FC236}">
-                <a16:creationId xmlns:a16="http://schemas.microsoft.com/office/drawing/2014/main" id="{EC3FFD93-3290-B18C-9CCD-912F82BF1448}"/>
-              </a:ext>
-            </a:extLst>
-          </p:cNvPr>
-          <p:cNvSpPr>
-            <a:spLocks noGrp="1"/>
-          </p:cNvSpPr>
-          <p:nvPr>
-            <p:ph type="body" sz="quarter" idx="10"/>
-          </p:nvPr>
-        </p:nvSpPr>
-        <p:spPr/>
-        <p:txBody>
-          <a:bodyPr/>
-          <a:lstStyle/>
-          <a:p>
-            <a:endParaRPr lang="en-US" dirty="0"/>
-          </a:p>
-        </p:txBody>
-      </p:sp>
-      <p:sp>
-        <p:nvSpPr>
-          <p:cNvPr id="9" name="Rechteck 7">
-            <a:extLst>
-              <a:ext uri="{FF2B5EF4-FFF2-40B4-BE49-F238E27FC236}">
-                <a16:creationId xmlns:a16="http://schemas.microsoft.com/office/drawing/2014/main" id="{B8414C30-3B0A-A952-5949-3DC4625D9C70}"/>
-              </a:ext>
-            </a:extLst>
-          </p:cNvPr>
-          <p:cNvSpPr/>
-          <p:nvPr/>
-        </p:nvSpPr>
-        <p:spPr>
-          <a:xfrm>
-            <a:off x="5833854" y="1649547"/>
-            <a:ext cx="3200896" cy="3279735"/>
-          </a:xfrm>
-          <a:prstGeom prst="rect">
-            <a:avLst/>
-          </a:prstGeom>
-          <a:noFill/>
-          <a:ln w="25400">
-            <a:solidFill>
-              <a:schemeClr val="tx1"/>
-            </a:solidFill>
-          </a:ln>
-        </p:spPr>
-        <p:style>
-          <a:lnRef idx="2">
-            <a:schemeClr val="accent1">
-              <a:shade val="50000"/>
-            </a:schemeClr>
-          </a:lnRef>
-          <a:fillRef idx="1">
-            <a:schemeClr val="accent1"/>
-          </a:fillRef>
-          <a:effectRef idx="0">
-            <a:schemeClr val="accent1"/>
-          </a:effectRef>
-          <a:fontRef idx="minor">
-            <a:schemeClr val="lt1"/>
-          </a:fontRef>
-        </p:style>
-        <p:txBody>
-          <a:bodyPr rot="0" spcFirstLastPara="0" vertOverflow="overflow" horzOverflow="overflow" vert="horz" wrap="square" lIns="91440" tIns="45720" rIns="91440" bIns="45720" numCol="1" spcCol="0" rtlCol="0" fromWordArt="0" anchor="ctr" anchorCtr="0" forceAA="0" compatLnSpc="1">
-            <a:prstTxWarp prst="textNoShape">
-              <a:avLst/>
-            </a:prstTxWarp>
-            <a:noAutofit/>
-          </a:bodyPr>
-          <a:lstStyle/>
-          <a:p>
-            <a:pPr algn="ctr">
-              <a:lnSpc>
-                <a:spcPct val="90000"/>
-              </a:lnSpc>
-            </a:pPr>
-            <a:endParaRPr lang="en-US" sz="1600"/>
-          </a:p>
-        </p:txBody>
-      </p:sp>
-      <p:sp>
-        <p:nvSpPr>
-          <p:cNvPr id="10" name="Inhaltsplatzhalter 2">
-            <a:extLst>
-              <a:ext uri="{FF2B5EF4-FFF2-40B4-BE49-F238E27FC236}">
-                <a16:creationId xmlns:a16="http://schemas.microsoft.com/office/drawing/2014/main" id="{B716A3F4-62B3-104A-B9EA-9D874CCB7F2F}"/>
-              </a:ext>
-            </a:extLst>
-          </p:cNvPr>
-          <p:cNvSpPr txBox="1">
-            <a:spLocks/>
-          </p:cNvSpPr>
-          <p:nvPr/>
-        </p:nvSpPr>
-        <p:spPr>
-          <a:xfrm>
-            <a:off x="5972614" y="1785742"/>
-            <a:ext cx="2941272" cy="786008"/>
-          </a:xfrm>
-          <a:prstGeom prst="rect">
-            <a:avLst/>
-          </a:prstGeom>
-        </p:spPr>
-        <p:txBody>
-          <a:bodyPr vert="horz" lIns="0" tIns="0" rIns="0" bIns="0" rtlCol="0">
-            <a:noAutofit/>
-          </a:bodyPr>
-          <a:lstStyle>
-            <a:lvl1pPr marL="230188" indent="-230188" algn="l" defTabSz="685800" rtl="0" eaLnBrk="1" latinLnBrk="0" hangingPunct="1">
-              <a:lnSpc>
-                <a:spcPct val="90000"/>
-              </a:lnSpc>
-              <a:spcBef>
-                <a:spcPts val="0"/>
-              </a:spcBef>
-              <a:buClr>
-                <a:schemeClr val="tx2"/>
-              </a:buClr>
-              <a:buFont typeface="Wingdings" charset="2"/>
-              <a:buChar char="§"/>
-              <a:tabLst/>
-              <a:defRPr sz="1600" kern="1200">
-                <a:solidFill>
-                  <a:schemeClr val="tx1"/>
-                </a:solidFill>
-                <a:latin typeface="+mn-lt"/>
-                <a:ea typeface="+mn-ea"/>
-                <a:cs typeface="+mn-cs"/>
-              </a:defRPr>
-            </a:lvl1pPr>
-            <a:lvl2pPr marL="576263" indent="-233363" algn="l" defTabSz="685800" rtl="0" eaLnBrk="1" latinLnBrk="0" hangingPunct="1">
-              <a:lnSpc>
-                <a:spcPct val="90000"/>
-              </a:lnSpc>
-              <a:spcBef>
-                <a:spcPts val="600"/>
-              </a:spcBef>
-              <a:buClr>
-                <a:schemeClr val="tx2"/>
-              </a:buClr>
-              <a:buFont typeface="Wingdings" charset="2"/>
-              <a:buChar char="§"/>
-              <a:tabLst/>
-              <a:defRPr sz="1600" kern="1200">
-                <a:solidFill>
-                  <a:schemeClr val="tx1"/>
-                </a:solidFill>
-                <a:latin typeface="+mn-lt"/>
-                <a:ea typeface="+mn-ea"/>
-                <a:cs typeface="+mn-cs"/>
-              </a:defRPr>
-            </a:lvl2pPr>
-            <a:lvl3pPr marL="914400" indent="-228600" algn="l" defTabSz="685800" rtl="0" eaLnBrk="1" latinLnBrk="0" hangingPunct="1">
-              <a:lnSpc>
-                <a:spcPct val="90000"/>
-              </a:lnSpc>
-              <a:spcBef>
-                <a:spcPts val="600"/>
-              </a:spcBef>
-              <a:buClr>
-                <a:schemeClr val="tx2"/>
-              </a:buClr>
-              <a:buFont typeface="Wingdings" charset="2"/>
-              <a:buChar char="§"/>
-              <a:tabLst/>
-              <a:defRPr sz="1600" kern="1200">
-                <a:solidFill>
-                  <a:schemeClr val="tx1"/>
-                </a:solidFill>
-                <a:latin typeface="+mn-lt"/>
-                <a:ea typeface="+mn-ea"/>
-                <a:cs typeface="+mn-cs"/>
-              </a:defRPr>
-            </a:lvl3pPr>
-            <a:lvl4pPr marL="1262063" indent="-233363" algn="l" defTabSz="685800" rtl="0" eaLnBrk="1" latinLnBrk="0" hangingPunct="1">
-              <a:lnSpc>
-                <a:spcPct val="90000"/>
-              </a:lnSpc>
-              <a:spcBef>
-                <a:spcPts val="600"/>
-              </a:spcBef>
-              <a:buClr>
-                <a:schemeClr val="tx2"/>
-              </a:buClr>
-              <a:buFont typeface="Wingdings" charset="2"/>
-              <a:buChar char="§"/>
-              <a:tabLst/>
-              <a:defRPr sz="1600" kern="1200">
-                <a:solidFill>
-                  <a:schemeClr val="tx1"/>
-                </a:solidFill>
-                <a:latin typeface="+mn-lt"/>
-                <a:ea typeface="+mn-ea"/>
-                <a:cs typeface="+mn-cs"/>
-              </a:defRPr>
-            </a:lvl4pPr>
-            <a:lvl5pPr marL="1600200" indent="-228600" algn="l" defTabSz="685800" rtl="0" eaLnBrk="1" latinLnBrk="0" hangingPunct="1">
-              <a:lnSpc>
-                <a:spcPct val="90000"/>
-              </a:lnSpc>
-              <a:spcBef>
-                <a:spcPts val="600"/>
-              </a:spcBef>
-              <a:buClr>
-                <a:schemeClr val="tx2"/>
-              </a:buClr>
-              <a:buFont typeface="Wingdings" charset="2"/>
-              <a:buChar char="§"/>
-              <a:tabLst/>
-              <a:defRPr sz="1600" kern="1200">
-                <a:solidFill>
-                  <a:schemeClr val="tx1"/>
-                </a:solidFill>
-                <a:latin typeface="+mn-lt"/>
-                <a:ea typeface="+mn-ea"/>
-                <a:cs typeface="+mn-cs"/>
-              </a:defRPr>
-            </a:lvl5pPr>
-            <a:lvl6pPr marL="1885950" indent="-171450" algn="l" defTabSz="685800" rtl="0" eaLnBrk="1" latinLnBrk="0" hangingPunct="1">
-              <a:lnSpc>
-                <a:spcPct val="90000"/>
-              </a:lnSpc>
-              <a:spcBef>
-                <a:spcPts val="375"/>
-              </a:spcBef>
-              <a:buFont typeface="Arial" panose="020B0604020202020204" pitchFamily="34" charset="0"/>
-              <a:buChar char="•"/>
-              <a:defRPr sz="1350" kern="1200">
-                <a:solidFill>
-                  <a:schemeClr val="tx1"/>
-                </a:solidFill>
-                <a:latin typeface="+mn-lt"/>
-                <a:ea typeface="+mn-ea"/>
-                <a:cs typeface="+mn-cs"/>
-              </a:defRPr>
-            </a:lvl6pPr>
-            <a:lvl7pPr marL="2228850" indent="-171450" algn="l" defTabSz="685800" rtl="0" eaLnBrk="1" latinLnBrk="0" hangingPunct="1">
-              <a:lnSpc>
-                <a:spcPct val="90000"/>
-              </a:lnSpc>
-              <a:spcBef>
-                <a:spcPts val="375"/>
-              </a:spcBef>
-              <a:buFont typeface="Arial" panose="020B0604020202020204" pitchFamily="34" charset="0"/>
-              <a:buChar char="•"/>
-              <a:defRPr sz="1350" kern="1200">
-                <a:solidFill>
-                  <a:schemeClr val="tx1"/>
-                </a:solidFill>
-                <a:latin typeface="+mn-lt"/>
-                <a:ea typeface="+mn-ea"/>
-                <a:cs typeface="+mn-cs"/>
-              </a:defRPr>
-            </a:lvl7pPr>
-            <a:lvl8pPr marL="2571750" indent="-171450" algn="l" defTabSz="685800" rtl="0" eaLnBrk="1" latinLnBrk="0" hangingPunct="1">
-              <a:lnSpc>
-                <a:spcPct val="90000"/>
-              </a:lnSpc>
-              <a:spcBef>
-                <a:spcPts val="375"/>
-              </a:spcBef>
-              <a:buFont typeface="Arial" panose="020B0604020202020204" pitchFamily="34" charset="0"/>
-              <a:buChar char="•"/>
-              <a:defRPr sz="1350" kern="1200">
-                <a:solidFill>
-                  <a:schemeClr val="tx1"/>
-                </a:solidFill>
-                <a:latin typeface="+mn-lt"/>
-                <a:ea typeface="+mn-ea"/>
-                <a:cs typeface="+mn-cs"/>
-              </a:defRPr>
-            </a:lvl8pPr>
-            <a:lvl9pPr marL="2914650" indent="-171450" algn="l" defTabSz="685800" rtl="0" eaLnBrk="1" latinLnBrk="0" hangingPunct="1">
-              <a:lnSpc>
-                <a:spcPct val="90000"/>
-              </a:lnSpc>
-              <a:spcBef>
-                <a:spcPts val="375"/>
-              </a:spcBef>
-              <a:buFont typeface="Arial" panose="020B0604020202020204" pitchFamily="34" charset="0"/>
-              <a:buChar char="•"/>
-              <a:defRPr sz="1350" kern="1200">
-                <a:solidFill>
-                  <a:schemeClr val="tx1"/>
-                </a:solidFill>
-                <a:latin typeface="+mn-lt"/>
-                <a:ea typeface="+mn-ea"/>
-                <a:cs typeface="+mn-cs"/>
-              </a:defRPr>
-            </a:lvl9pPr>
-          </a:lstStyle>
-          <a:p>
-            <a:pPr marL="0" indent="0">
-              <a:buNone/>
-            </a:pPr>
-            <a:r>
-              <a:rPr lang="en-US" dirty="0"/>
-              <a:t>Example:</a:t>
-            </a:r>
-          </a:p>
-        </p:txBody>
-      </p:sp>
-      <p:pic>
-        <p:nvPicPr>
-          <p:cNvPr id="3" name="Picture 2">
-            <a:extLst>
-              <a:ext uri="{FF2B5EF4-FFF2-40B4-BE49-F238E27FC236}">
-                <a16:creationId xmlns:a16="http://schemas.microsoft.com/office/drawing/2014/main" id="{501135BF-998B-7B9B-95C5-E50AD4173943}"/>
-              </a:ext>
-            </a:extLst>
-          </p:cNvPr>
-          <p:cNvPicPr>
-            <a:picLocks noChangeAspect="1"/>
-          </p:cNvPicPr>
-          <p:nvPr/>
-        </p:nvPicPr>
-        <p:blipFill>
-          <a:blip r:embed="rId2"/>
-          <a:stretch>
-            <a:fillRect/>
-          </a:stretch>
-        </p:blipFill>
-        <p:spPr>
-          <a:xfrm>
-            <a:off x="6051282" y="2580522"/>
-            <a:ext cx="1557831" cy="2277228"/>
-          </a:xfrm>
-          <a:prstGeom prst="rect">
-            <a:avLst/>
-          </a:prstGeom>
-        </p:spPr>
-      </p:pic>
-    </p:spTree>
-    <p:extLst>
-      <p:ext uri="{BB962C8B-B14F-4D97-AF65-F5344CB8AC3E}">
-        <p14:creationId xmlns:p14="http://schemas.microsoft.com/office/powerpoint/2010/main" val="986382170"/>
-      </p:ext>
-    </p:extLst>
-  </p:cSld>
-  <p:clrMapOvr>
-    <a:masterClrMapping/>
-  </p:clrMapOvr>
-  <mc:AlternateContent xmlns:mc="http://schemas.openxmlformats.org/markup-compatibility/2006" xmlns:p14="http://schemas.microsoft.com/office/powerpoint/2010/main">
-    <mc:Choice Requires="p14">
-      <p:transition p14:dur="250">
-        <p:fade/>
-      </p:transition>
-    </mc:Choice>
-    <mc:Fallback xmlns="">
-      <p:transition>
-        <p:fade/>
-      </p:transition>
-    </mc:Fallback>
-  </mc:AlternateContent>
-</p:sld>
-</file>
-
-<file path=ppt/slides/slide5.xml><?xml version="1.0" encoding="utf-8"?>
-<p:sld xmlns:a="http://schemas.openxmlformats.org/drawingml/2006/main" xmlns:r="http://schemas.openxmlformats.org/officeDocument/2006/relationships" xmlns:p="http://schemas.openxmlformats.org/presentationml/2006/main" show="0">
-  <p:cSld>
-    <p:spTree>
-      <p:nvGrpSpPr>
-        <p:cNvPr id="1" name=""/>
-        <p:cNvGrpSpPr/>
-        <p:nvPr/>
-      </p:nvGrpSpPr>
-      <p:grpSpPr>
-        <a:xfrm>
-          <a:off x="0" y="0"/>
-          <a:ext cx="0" cy="0"/>
-          <a:chOff x="0" y="0"/>
-          <a:chExt cx="0" cy="0"/>
-        </a:xfrm>
-      </p:grpSpPr>
-      <p:sp>
-        <p:nvSpPr>
-          <p:cNvPr id="2" name="Titel 1">
-            <a:extLst>
-              <a:ext uri="{FF2B5EF4-FFF2-40B4-BE49-F238E27FC236}">
-                <a16:creationId xmlns:a16="http://schemas.microsoft.com/office/drawing/2014/main" id="{B8DF4CD1-D7BA-2F86-AED5-2D817251F7CD}"/>
-              </a:ext>
-            </a:extLst>
-          </p:cNvPr>
-          <p:cNvSpPr>
-            <a:spLocks noGrp="1"/>
-          </p:cNvSpPr>
-          <p:nvPr>
-            <p:ph type="title"/>
-          </p:nvPr>
-        </p:nvSpPr>
-        <p:spPr/>
-        <p:txBody>
-          <a:bodyPr/>
-          <a:lstStyle/>
-          <a:p>
-            <a:r>
-              <a:rPr lang="en-US" dirty="0"/>
-              <a:t>Proposal (DEXPI 2.0 Implementation)</a:t>
-            </a:r>
-          </a:p>
-        </p:txBody>
-      </p:sp>
-      <p:sp>
-        <p:nvSpPr>
-          <p:cNvPr id="3" name="Inhaltsplatzhalter 2">
-            <a:extLst>
-              <a:ext uri="{FF2B5EF4-FFF2-40B4-BE49-F238E27FC236}">
-                <a16:creationId xmlns:a16="http://schemas.microsoft.com/office/drawing/2014/main" id="{1643D8E3-4236-898B-427F-203EC0AD3737}"/>
-              </a:ext>
-            </a:extLst>
-          </p:cNvPr>
-          <p:cNvSpPr>
-            <a:spLocks noGrp="1"/>
-          </p:cNvSpPr>
-          <p:nvPr>
-            <p:ph idx="1"/>
-          </p:nvPr>
-        </p:nvSpPr>
-        <p:spPr/>
-        <p:txBody>
-          <a:bodyPr/>
-          <a:lstStyle/>
-          <a:p>
-            <a:endParaRPr lang="en-US" dirty="0"/>
-          </a:p>
-          <a:p>
-            <a:pPr marL="0" indent="0">
-              <a:buNone/>
-            </a:pPr>
-            <a:endParaRPr lang="en-US" dirty="0"/>
-          </a:p>
-        </p:txBody>
-      </p:sp>
-      <p:sp>
-        <p:nvSpPr>
-          <p:cNvPr id="4" name="Textplatzhalter 3">
-            <a:extLst>
-              <a:ext uri="{FF2B5EF4-FFF2-40B4-BE49-F238E27FC236}">
-                <a16:creationId xmlns:a16="http://schemas.microsoft.com/office/drawing/2014/main" id="{E27FC90F-B95F-42AC-244A-8A05F68C9B18}"/>
-              </a:ext>
-            </a:extLst>
-          </p:cNvPr>
-          <p:cNvSpPr>
-            <a:spLocks noGrp="1"/>
-          </p:cNvSpPr>
-          <p:nvPr>
-            <p:ph type="body" sz="quarter" idx="10"/>
-          </p:nvPr>
-        </p:nvSpPr>
-        <p:spPr/>
-        <p:txBody>
-          <a:bodyPr/>
-          <a:lstStyle/>
-          <a:p>
-            <a:endParaRPr lang="en-US"/>
-          </a:p>
-        </p:txBody>
-      </p:sp>
-    </p:spTree>
-    <p:extLst>
-      <p:ext uri="{BB962C8B-B14F-4D97-AF65-F5344CB8AC3E}">
-        <p14:creationId xmlns:p14="http://schemas.microsoft.com/office/powerpoint/2010/main" val="365156771"/>
-      </p:ext>
-    </p:extLst>
-  </p:cSld>
-  <p:clrMapOvr>
-    <a:masterClrMapping/>
-  </p:clrMapOvr>
-  <mc:AlternateContent xmlns:mc="http://schemas.openxmlformats.org/markup-compatibility/2006" xmlns:p14="http://schemas.microsoft.com/office/powerpoint/2010/main">
-    <mc:Choice Requires="p14">
-      <p:transition p14:dur="250">
-        <p:fade/>
-      </p:transition>
-    </mc:Choice>
-    <mc:Fallback xmlns="">
-      <p:transition>
-        <p:fade/>
-      </p:transition>
-    </mc:Fallback>
-  </mc:AlternateContent>
-</p:sld>
-</file>
-
-<file path=ppt/slides/slide6.xml><?xml version="1.0" encoding="utf-8"?>
-<p:sld xmlns:a="http://schemas.openxmlformats.org/drawingml/2006/main" xmlns:r="http://schemas.openxmlformats.org/officeDocument/2006/relationships" xmlns:p="http://schemas.openxmlformats.org/presentationml/2006/main" show="0">
-  <p:cSld>
-    <p:spTree>
-      <p:nvGrpSpPr>
-        <p:cNvPr id="1" name=""/>
-        <p:cNvGrpSpPr/>
-        <p:nvPr/>
-      </p:nvGrpSpPr>
-      <p:grpSpPr>
-        <a:xfrm>
-          <a:off x="0" y="0"/>
-          <a:ext cx="0" cy="0"/>
-          <a:chOff x="0" y="0"/>
-          <a:chExt cx="0" cy="0"/>
-        </a:xfrm>
-      </p:grpSpPr>
-      <p:sp>
-        <p:nvSpPr>
-          <p:cNvPr id="2" name="Titel 1">
-            <a:extLst>
-              <a:ext uri="{FF2B5EF4-FFF2-40B4-BE49-F238E27FC236}">
-                <a16:creationId xmlns:a16="http://schemas.microsoft.com/office/drawing/2014/main" id="{9915A59C-6338-36DF-DD89-48827A3637C2}"/>
-              </a:ext>
-            </a:extLst>
-          </p:cNvPr>
-          <p:cNvSpPr>
-            <a:spLocks noGrp="1"/>
-          </p:cNvSpPr>
-          <p:nvPr>
-            <p:ph type="title"/>
-          </p:nvPr>
-        </p:nvSpPr>
-        <p:spPr/>
-        <p:txBody>
-          <a:bodyPr/>
-          <a:lstStyle/>
-          <a:p>
-            <a:r>
-              <a:rPr lang="en-US" dirty="0"/>
-              <a:t>Example (Proteus, simplified)</a:t>
-            </a:r>
-          </a:p>
-        </p:txBody>
-      </p:sp>
-      <p:sp>
-        <p:nvSpPr>
-          <p:cNvPr id="4" name="Textplatzhalter 3">
-            <a:extLst>
-              <a:ext uri="{FF2B5EF4-FFF2-40B4-BE49-F238E27FC236}">
-                <a16:creationId xmlns:a16="http://schemas.microsoft.com/office/drawing/2014/main" id="{63EF2857-418F-59B8-723E-9D4A352EE463}"/>
-              </a:ext>
-            </a:extLst>
-          </p:cNvPr>
-          <p:cNvSpPr>
-            <a:spLocks noGrp="1"/>
-          </p:cNvSpPr>
-          <p:nvPr>
-            <p:ph type="body" sz="quarter" idx="10"/>
-          </p:nvPr>
-        </p:nvSpPr>
-        <p:spPr/>
-        <p:txBody>
-          <a:bodyPr/>
-          <a:lstStyle/>
-          <a:p>
-            <a:endParaRPr lang="en-US" dirty="0"/>
-          </a:p>
-        </p:txBody>
-      </p:sp>
-    </p:spTree>
-    <p:extLst>
-      <p:ext uri="{BB962C8B-B14F-4D97-AF65-F5344CB8AC3E}">
-        <p14:creationId xmlns:p14="http://schemas.microsoft.com/office/powerpoint/2010/main" val="1284707976"/>
-      </p:ext>
-    </p:extLst>
-  </p:cSld>
-  <p:clrMapOvr>
-    <a:masterClrMapping/>
-  </p:clrMapOvr>
-  <mc:AlternateContent xmlns:mc="http://schemas.openxmlformats.org/markup-compatibility/2006" xmlns:p14="http://schemas.microsoft.com/office/powerpoint/2010/main">
-    <mc:Choice Requires="p14">
-      <p:transition p14:dur="250">
-        <p:fade/>
-      </p:transition>
-    </mc:Choice>
-    <mc:Fallback xmlns="">
-      <p:transition>
-        <p:fade/>
-      </p:transition>
-    </mc:Fallback>
-  </mc:AlternateContent>
-</p:sld>
-</file>
-
-<file path=ppt/slides/slide7.xml><?xml version="1.0" encoding="utf-8"?>
-<p:sld xmlns:a="http://schemas.openxmlformats.org/drawingml/2006/main" xmlns:r="http://schemas.openxmlformats.org/officeDocument/2006/relationships" xmlns:p="http://schemas.openxmlformats.org/presentationml/2006/main">
-  <p:cSld>
-    <p:spTree>
-      <p:nvGrpSpPr>
-        <p:cNvPr id="1" name=""/>
-        <p:cNvGrpSpPr/>
-        <p:nvPr/>
-      </p:nvGrpSpPr>
-      <p:grpSpPr>
-        <a:xfrm>
-          <a:off x="0" y="0"/>
-          <a:ext cx="0" cy="0"/>
-          <a:chOff x="0" y="0"/>
-          <a:chExt cx="0" cy="0"/>
-        </a:xfrm>
-      </p:grpSpPr>
-      <p:sp>
-        <p:nvSpPr>
-          <p:cNvPr id="2" name="Titel 1">
-            <a:extLst>
-              <a:ext uri="{FF2B5EF4-FFF2-40B4-BE49-F238E27FC236}">
-                <a16:creationId xmlns:a16="http://schemas.microsoft.com/office/drawing/2014/main" id="{B8DF4CD1-D7BA-2F86-AED5-2D817251F7CD}"/>
-              </a:ext>
-            </a:extLst>
-          </p:cNvPr>
-          <p:cNvSpPr>
-            <a:spLocks noGrp="1"/>
-          </p:cNvSpPr>
-          <p:nvPr>
-            <p:ph type="title"/>
-          </p:nvPr>
-        </p:nvSpPr>
-        <p:spPr/>
-        <p:txBody>
-          <a:bodyPr/>
-          <a:lstStyle/>
-          <a:p>
-            <a:r>
-              <a:rPr lang="en-US" dirty="0"/>
-              <a:t>Questions, remarks, …?</a:t>
-            </a:r>
-          </a:p>
-        </p:txBody>
-      </p:sp>
-      <p:sp>
-        <p:nvSpPr>
-          <p:cNvPr id="3" name="Inhaltsplatzhalter 2">
-            <a:extLst>
-              <a:ext uri="{FF2B5EF4-FFF2-40B4-BE49-F238E27FC236}">
-                <a16:creationId xmlns:a16="http://schemas.microsoft.com/office/drawing/2014/main" id="{1643D8E3-4236-898B-427F-203EC0AD3737}"/>
-              </a:ext>
-            </a:extLst>
-          </p:cNvPr>
-          <p:cNvSpPr>
-            <a:spLocks noGrp="1"/>
-          </p:cNvSpPr>
-          <p:nvPr>
-            <p:ph idx="1"/>
-          </p:nvPr>
-        </p:nvSpPr>
-        <p:spPr/>
-        <p:txBody>
-          <a:bodyPr/>
-          <a:lstStyle/>
-          <a:p>
-            <a:pPr marL="0" indent="0">
-              <a:buNone/>
-            </a:pPr>
-            <a:endParaRPr lang="en-US" dirty="0"/>
-          </a:p>
-        </p:txBody>
-      </p:sp>
-      <p:sp>
-        <p:nvSpPr>
-          <p:cNvPr id="4" name="Textplatzhalter 3">
-            <a:extLst>
-              <a:ext uri="{FF2B5EF4-FFF2-40B4-BE49-F238E27FC236}">
-                <a16:creationId xmlns:a16="http://schemas.microsoft.com/office/drawing/2014/main" id="{E27FC90F-B95F-42AC-244A-8A05F68C9B18}"/>
-              </a:ext>
-            </a:extLst>
-          </p:cNvPr>
-          <p:cNvSpPr>
-            <a:spLocks noGrp="1"/>
-          </p:cNvSpPr>
-          <p:nvPr>
-            <p:ph type="body" sz="quarter" idx="10"/>
-          </p:nvPr>
-        </p:nvSpPr>
-        <p:spPr/>
-        <p:txBody>
-          <a:bodyPr/>
-          <a:lstStyle/>
-          <a:p>
-            <a:endParaRPr lang="en-US"/>
-          </a:p>
-        </p:txBody>
-      </p:sp>
-    </p:spTree>
-    <p:extLst>
-      <p:ext uri="{BB962C8B-B14F-4D97-AF65-F5344CB8AC3E}">
-        <p14:creationId xmlns:p14="http://schemas.microsoft.com/office/powerpoint/2010/main" val="4163381459"/>
       </p:ext>
     </p:extLst>
   </p:cSld>
